--- a/single_day/slides/03_foreign_code_demo.pptx
+++ b/single_day/slides/03_foreign_code_demo.pptx
@@ -3473,7 +3473,7 @@
                 <a:ea typeface="Courier New" pitchFamily="34" charset="-122"/>
                 <a:cs typeface="Courier New" pitchFamily="34" charset="-120"/>
               </a:rPr>
-              <a:t>  'Match3.LevelData.Instance</a:t>
+              <a:t>  'return Match3.LevelData</a:t>
             </a:r>
             <a:endParaRPr lang="en-US" sz="1150" dirty="0"/>
           </a:p>
@@ -3493,7 +3493,7 @@
                 <a:ea typeface="Courier New" pitchFamily="34" charset="-122"/>
                 <a:cs typeface="Courier New" pitchFamily="34" charset="-120"/>
               </a:rPr>
-              <a:t>   .RemainingMove' → 20</a:t>
+              <a:t>   .Instance.RemainingMove;' → 20</a:t>
             </a:r>
             <a:endParaRPr lang="en-US" sz="1150" dirty="0"/>
           </a:p>
